--- a/atagutbrain.pptx
+++ b/atagutbrain.pptx
@@ -18405,7 +18405,7 @@
           <p:nvPr>
             <p:extLst>
               <p:ext uri="{D42A27DB-BD31-4B8C-83A1-F6EECF244321}">
-                <p14:modId xmlns:p14="http://schemas.microsoft.com/office/powerpoint/2010/main" val="765612702"/>
+                <p14:modId xmlns:p14="http://schemas.microsoft.com/office/powerpoint/2010/main" val="568347193"/>
               </p:ext>
             </p:extLst>
           </p:nvPr>
@@ -19009,23 +19009,7 @@
                         <a:rPr lang="it-IT" sz="1500" dirty="0">
                           <a:latin typeface="Gill Sans MT" panose="020B0502020104020203" pitchFamily="34" charset="0"/>
                         </a:rPr>
-                        <a:t>P:0.7071</a:t>
-                      </a:r>
-                    </a:p>
-                    <a:p>
-                      <a:r>
-                        <a:rPr lang="it-IT" sz="1500" dirty="0">
-                          <a:latin typeface="Gill Sans MT" panose="020B0502020104020203" pitchFamily="34" charset="0"/>
-                        </a:rPr>
-                        <a:t>R:0.8025</a:t>
-                      </a:r>
-                    </a:p>
-                    <a:p>
-                      <a:r>
-                        <a:rPr lang="it-IT" sz="1500" dirty="0">
-                          <a:latin typeface="Gill Sans MT" panose="020B0502020104020203" pitchFamily="34" charset="0"/>
-                        </a:rPr>
-                        <a:t>F1:0.7518</a:t>
+                        <a:t>-</a:t>
                       </a:r>
                     </a:p>
                   </a:txBody>
@@ -19055,14 +19039,27 @@
                     <a:lstStyle/>
                     <a:p>
                       <a:r>
-                        <a:rPr lang="it-IT" dirty="0">
+                        <a:rPr lang="it-IT" sz="1500" dirty="0">
                           <a:latin typeface="Gill Sans MT" panose="020B0502020104020203" pitchFamily="34" charset="0"/>
                         </a:rPr>
-                        <a:t>-</a:t>
+                        <a:t>P:0.7071</a:t>
                       </a:r>
-                      <a:endParaRPr lang="en-US" dirty="0">
-                        <a:latin typeface="Gill Sans MT" panose="020B0502020104020203" pitchFamily="34" charset="0"/>
-                      </a:endParaRPr>
+                    </a:p>
+                    <a:p>
+                      <a:r>
+                        <a:rPr lang="it-IT" sz="1500" dirty="0">
+                          <a:latin typeface="Gill Sans MT" panose="020B0502020104020203" pitchFamily="34" charset="0"/>
+                        </a:rPr>
+                        <a:t>R:0.8025</a:t>
+                      </a:r>
+                    </a:p>
+                    <a:p>
+                      <a:r>
+                        <a:rPr lang="it-IT" sz="1500" dirty="0">
+                          <a:latin typeface="Gill Sans MT" panose="020B0502020104020203" pitchFamily="34" charset="0"/>
+                        </a:rPr>
+                        <a:t>F1:0.7518</a:t>
+                      </a:r>
                     </a:p>
                   </a:txBody>
                   <a:tcPr/>
@@ -20608,7 +20605,7 @@
           <p:nvPr>
             <p:extLst>
               <p:ext uri="{D42A27DB-BD31-4B8C-83A1-F6EECF244321}">
-                <p14:modId xmlns:p14="http://schemas.microsoft.com/office/powerpoint/2010/main" val="1012656971"/>
+                <p14:modId xmlns:p14="http://schemas.microsoft.com/office/powerpoint/2010/main" val="3869860143"/>
               </p:ext>
             </p:extLst>
           </p:nvPr>
@@ -20747,10 +20744,7 @@
                         <a:rPr lang="it-IT" dirty="0" err="1"/>
                         <a:t>Bronze</a:t>
                       </a:r>
-                      <a:r>
-                        <a:rPr lang="it-IT" dirty="0"/>
-                        <a:t>-</a:t>
-                      </a:r>
+                      <a:endParaRPr lang="it-IT" dirty="0"/>
                     </a:p>
                     <a:p>
                       <a:r>
@@ -20796,19 +20790,19 @@
                     <a:p>
                       <a:r>
                         <a:rPr lang="it-IT" dirty="0"/>
-                        <a:t>P:0.5130</a:t>
+                        <a:t>P:0.8753</a:t>
                       </a:r>
                     </a:p>
                     <a:p>
                       <a:r>
                         <a:rPr lang="it-IT" dirty="0"/>
-                        <a:t>R:0.9135</a:t>
+                        <a:t>R:0.6757</a:t>
                       </a:r>
                     </a:p>
                     <a:p>
                       <a:r>
                         <a:rPr lang="it-IT" dirty="0"/>
-                        <a:t>F1:0.6571</a:t>
+                        <a:t>F1:0.7627</a:t>
                       </a:r>
                       <a:endParaRPr lang="en-US" dirty="0"/>
                     </a:p>
@@ -20822,19 +20816,19 @@
                     <a:p>
                       <a:r>
                         <a:rPr lang="it-IT" dirty="0"/>
-                        <a:t>P:0.4154</a:t>
+                        <a:t>P:0.7694</a:t>
                       </a:r>
                     </a:p>
                     <a:p>
                       <a:r>
                         <a:rPr lang="it-IT" dirty="0"/>
-                        <a:t>R:0.8640</a:t>
+                        <a:t>R:0.6085</a:t>
                       </a:r>
                     </a:p>
                     <a:p>
                       <a:r>
                         <a:rPr lang="it-IT" dirty="0"/>
-                        <a:t>F1:0.5610</a:t>
+                        <a:t>F1:0.6795</a:t>
                       </a:r>
                       <a:endParaRPr lang="en-US" dirty="0"/>
                     </a:p>
@@ -20848,19 +20842,19 @@
                     <a:p>
                       <a:r>
                         <a:rPr lang="it-IT" dirty="0"/>
-                        <a:t>P:0.4397</a:t>
+                        <a:t>P:0.6938</a:t>
                       </a:r>
                     </a:p>
                     <a:p>
                       <a:r>
                         <a:rPr lang="it-IT" dirty="0"/>
-                        <a:t>R:0.7479</a:t>
+                        <a:t>R:0.4493</a:t>
                       </a:r>
                     </a:p>
                     <a:p>
                       <a:r>
                         <a:rPr lang="it-IT" dirty="0"/>
-                        <a:t>F1:0.5538</a:t>
+                        <a:t>F1:0.5454</a:t>
                       </a:r>
                       <a:endParaRPr lang="en-US" dirty="0"/>
                     </a:p>
@@ -35813,6 +35807,26 @@
                 <a:cs typeface="Calibri"/>
               </a:rPr>
               <a:t>Bronze Collection</a:t>
+            </a:r>
+          </a:p>
+          <a:p>
+            <a:pPr marL="298450" marR="5080" indent="-228600">
+              <a:lnSpc>
+                <a:spcPct val="90000"/>
+              </a:lnSpc>
+              <a:spcBef>
+                <a:spcPts val="100"/>
+              </a:spcBef>
+              <a:buFont typeface="Arial" panose="020B0604020202020204" pitchFamily="34" charset="0"/>
+              <a:buChar char="•"/>
+            </a:pPr>
+            <a:r>
+              <a:rPr lang="en-US" sz="2900" dirty="0">
+                <a:latin typeface="Gill Sans MT" panose="020B0502020104020203" pitchFamily="34" charset="0"/>
+                <a:ea typeface="Calibri"/>
+                <a:cs typeface="Calibri"/>
+              </a:rPr>
+              <a:t>Dev Dataset</a:t>
             </a:r>
           </a:p>
           <a:p>
